--- a/Group4_CS4420_Final_Project_Presentation.pptx
+++ b/Group4_CS4420_Final_Project_Presentation.pptx
@@ -2638,8 +2638,8 @@
         </p:nvSpPr>
         <p:spPr>
           <a:xfrm>
-            <a:off x="7878154" y="1904430"/>
-            <a:ext cx="3308291" cy="3049139"/>
+            <a:off x="7215215" y="2743200"/>
+            <a:ext cx="4732275" cy="2227890"/>
           </a:xfrm>
           <a:prstGeom prst="roundRect">
             <a:avLst/>
@@ -2670,7 +2670,7 @@
         </p:nvSpPr>
         <p:spPr>
           <a:xfrm>
-            <a:off x="8221055" y="2270191"/>
+            <a:off x="8221055" y="3108960"/>
             <a:ext cx="2560320" cy="320040"/>
           </a:xfrm>
           <a:prstGeom prst="rect">
@@ -2687,14 +2687,14 @@
               <a:buNone/>
             </a:pPr>
             <a:r>
-              <a:rPr lang="en-US" sz="2100" b="1" dirty="0">
+              <a:rPr lang="en-US" sz="3600" b="1" dirty="0">
                 <a:solidFill>
                   <a:srgbClr val="FFFFFF"/>
                 </a:solidFill>
               </a:rPr>
               <a:t>Video link</a:t>
             </a:r>
-            <a:endParaRPr lang="en-US" sz="2100" dirty="0"/>
+            <a:endParaRPr lang="en-US" sz="3600" dirty="0"/>
           </a:p>
         </p:txBody>
       </p:sp>
@@ -2706,8 +2706,8 @@
         </p:nvSpPr>
         <p:spPr>
           <a:xfrm>
-            <a:off x="8266775" y="2837119"/>
-            <a:ext cx="2514600" cy="1033272"/>
+            <a:off x="7415684" y="3675888"/>
+            <a:ext cx="4425795" cy="920965"/>
           </a:xfrm>
           <a:prstGeom prst="rect">
             <a:avLst/>
@@ -2719,54 +2719,87 @@
           <a:bodyPr wrap="square" lIns="381" tIns="381" rIns="381" bIns="381" rtlCol="0" anchor="ctr"/>
           <a:lstStyle/>
           <a:p>
+            <a:r>
+              <a:rPr lang="en-US" sz="1600" dirty="0">
+                <a:solidFill>
+                  <a:schemeClr val="bg1"/>
+                </a:solidFill>
+              </a:rPr>
+              <a:t>https://</a:t>
+            </a:r>
+            <a:r>
+              <a:rPr lang="en-US" sz="1600" dirty="0" err="1">
+                <a:solidFill>
+                  <a:schemeClr val="bg1"/>
+                </a:solidFill>
+              </a:rPr>
+              <a:t>www.youtube.com</a:t>
+            </a:r>
+            <a:r>
+              <a:rPr lang="en-US" sz="1600" dirty="0">
+                <a:solidFill>
+                  <a:schemeClr val="bg1"/>
+                </a:solidFill>
+              </a:rPr>
+              <a:t>/</a:t>
+            </a:r>
+            <a:r>
+              <a:rPr lang="en-US" sz="1600" dirty="0" err="1">
+                <a:solidFill>
+                  <a:schemeClr val="bg1"/>
+                </a:solidFill>
+              </a:rPr>
+              <a:t>watch?v</a:t>
+            </a:r>
+            <a:r>
+              <a:rPr lang="en-US" sz="1600" dirty="0">
+                <a:solidFill>
+                  <a:schemeClr val="bg1"/>
+                </a:solidFill>
+              </a:rPr>
+              <a:t>=</a:t>
+            </a:r>
+            <a:r>
+              <a:rPr lang="en-US" sz="1600" dirty="0" err="1">
+                <a:solidFill>
+                  <a:schemeClr val="bg1"/>
+                </a:solidFill>
+              </a:rPr>
+              <a:t>RKsHJEXOhP</a:t>
+            </a:r>
+            <a:endParaRPr lang="en-US" sz="1600" dirty="0">
+              <a:solidFill>
+                <a:schemeClr val="bg1"/>
+              </a:solidFill>
+            </a:endParaRPr>
+          </a:p>
+        </p:txBody>
+      </p:sp>
+      <p:sp>
+        <p:nvSpPr>
+          <p:cNvPr id="12" name="Text 10"/>
+          <p:cNvSpPr/>
+          <p:nvPr/>
+        </p:nvSpPr>
+        <p:spPr>
+          <a:xfrm>
+            <a:off x="8221055" y="4971089"/>
+            <a:ext cx="2560320" cy="320040"/>
+          </a:xfrm>
+          <a:prstGeom prst="rect">
+            <a:avLst/>
+          </a:prstGeom>
+          <a:noFill/>
+          <a:ln/>
+        </p:spPr>
+        <p:txBody>
+          <a:bodyPr wrap="square" lIns="0" tIns="0" rIns="0" bIns="0" rtlCol="0" anchor="ctr"/>
+          <a:lstStyle/>
+          <a:p>
             <a:pPr marL="0" indent="0" algn="ctr">
               <a:buNone/>
             </a:pPr>
-            <a:r>
-              <a:rPr lang="en-US" sz="1400" dirty="0">
-                <a:solidFill>
-                  <a:srgbClr val="DDF0FF"/>
-                </a:solidFill>
-              </a:rPr>
-              <a:t>Link Coming Soon</a:t>
-            </a:r>
-            <a:endParaRPr lang="en-US" sz="1400" dirty="0"/>
-          </a:p>
-        </p:txBody>
-      </p:sp>
-      <p:sp>
-        <p:nvSpPr>
-          <p:cNvPr id="12" name="Text 10"/>
-          <p:cNvSpPr/>
-          <p:nvPr/>
-        </p:nvSpPr>
-        <p:spPr>
-          <a:xfrm>
-            <a:off x="8221055" y="4132320"/>
-            <a:ext cx="2560320" cy="320040"/>
-          </a:xfrm>
-          <a:prstGeom prst="rect">
-            <a:avLst/>
-          </a:prstGeom>
-          <a:noFill/>
-          <a:ln/>
-        </p:spPr>
-        <p:txBody>
-          <a:bodyPr wrap="square" lIns="0" tIns="0" rIns="0" bIns="0" rtlCol="0" anchor="ctr"/>
-          <a:lstStyle/>
-          <a:p>
-            <a:pPr marL="0" indent="0" algn="ctr">
-              <a:buNone/>
-            </a:pPr>
-            <a:r>
-              <a:rPr lang="en-US" sz="2000" b="1" dirty="0">
-                <a:solidFill>
-                  <a:srgbClr val="FFFFFF"/>
-                </a:solidFill>
-              </a:rPr>
-              <a:t>Thank you</a:t>
-            </a:r>
-            <a:endParaRPr lang="en-US" sz="2000" dirty="0"/>
+            <a:endParaRPr lang="en-US" sz="3200" dirty="0"/>
           </a:p>
         </p:txBody>
       </p:sp>
